--- a/classes/parte-0-fundamentos-y-prerrequisitos/017-python-para-seguridad-manipulacion-de-paquetes-con-scapy/clase-017-presentacion.pptx
+++ b/classes/parte-0-fundamentos-y-prerrequisitos/017-python-para-seguridad-manipulacion-de-paquetes-con-scapy/clase-017-presentacion.pptx
@@ -17,6 +17,10 @@
     <p:sldId id="265" r:id="rId16"/>
     <p:sldId id="266" r:id="rId17"/>
     <p:sldId id="267" r:id="rId18"/>
+    <p:sldId id="268" r:id="rId19"/>
+    <p:sldId id="269" r:id="rId20"/>
+    <p:sldId id="270" r:id="rId21"/>
+    <p:sldId id="271" r:id="rId22"/>
   </p:sldIdLst>
   <p:sldSz cx="9144000" cy="6858000" type="screen4x3"/>
   <p:notesSz cx="6858000" cy="9144000"/>
@@ -3198,7 +3202,7 @@
                   <a:srgbClr val="0B3D2E"/>
                 </a:solidFill>
               </a:rPr>
-              <a:t>⚠️ Errores comunes</a:t>
+              <a:t>✍️ Ejercicios</a:t>
             </a:r>
           </a:p>
         </p:txBody>
@@ -3236,67 +3240,82 @@
                   <a:srgbClr val="22282E"/>
                 </a:solidFill>
               </a:rPr>
-              <a:t>•  PermissionError / no envía nada — Scapy necesita root para raw sockets. Ejecuta con sudo.</a:t>
-            </a:r>
-          </a:p>
-          <a:p>
-            <a:pPr>
-              <a:spcAft>
-                <a:spcPts val="600"/>
-              </a:spcAft>
-            </a:pPr>
-            <a:r>
-              <a:rPr sz="1500">
-                <a:solidFill>
-                  <a:srgbClr val="22282E"/>
-                </a:solidFill>
-              </a:rPr>
-              <a:t>•  Interfaz equivocada — Scapy usa la ruta por defecto. Especifica iface= si hace falta.</a:t>
-            </a:r>
-          </a:p>
-          <a:p>
-            <a:pPr>
-              <a:spcAft>
-                <a:spcPts val="600"/>
-              </a:spcAft>
-            </a:pPr>
-            <a:r>
-              <a:rPr sz="1500">
-                <a:solidFill>
-                  <a:srgbClr val="22282E"/>
-                </a:solidFill>
-              </a:rPr>
-              <a:t>•  sr1 devuelve None siempre — Timeout corto o host filtrado. Sube el timeout y verifica conectividad.</a:t>
-            </a:r>
-          </a:p>
-          <a:p>
-            <a:pPr>
-              <a:spcAft>
-                <a:spcPts val="600"/>
-              </a:spcAft>
-            </a:pPr>
-            <a:r>
-              <a:rPr sz="1500">
-                <a:solidFill>
-                  <a:srgbClr val="22282E"/>
-                </a:solidFill>
-              </a:rPr>
-              <a:t>•  Los paquetes no aparecen en Wireshark — Filtras mal o miras otra interfaz. Ajusta el filtro y la NIC.</a:t>
-            </a:r>
-          </a:p>
-          <a:p>
-            <a:pPr>
-              <a:spcAft>
-                <a:spcPts val="600"/>
-              </a:spcAft>
-            </a:pPr>
-            <a:r>
-              <a:rPr sz="1500">
-                <a:solidFill>
-                  <a:srgbClr val="22282E"/>
-                </a:solidFill>
-              </a:rPr>
-              <a:t>•  El SYN scan deja conexiones a medias — No enviaste el RST. Cierra tú la conexión tras el SYN-ACK.</a:t>
+              <a:t>•  Modifica el ping para variar el TTL (por ejemplo de 1 a 10) y reconstruye un traceroute manual observando de qué salto llega el ICMP Time Exceeded.</a:t>
+            </a:r>
+          </a:p>
+          <a:p>
+            <a:pPr>
+              <a:spcAft>
+                <a:spcPts val="600"/>
+              </a:spcAft>
+            </a:pPr>
+            <a:r>
+              <a:rPr sz="1500">
+                <a:solidFill>
+                  <a:srgbClr val="22282E"/>
+                </a:solidFill>
+              </a:rPr>
+              <a:t>•  Escribe un escáner que recorra una lista de puertos con SYN scan y clasifique cada uno como abierto, cerrado o filtrado.</a:t>
+            </a:r>
+          </a:p>
+          <a:p>
+            <a:pPr>
+              <a:spcAft>
+                <a:spcPts val="600"/>
+              </a:spcAft>
+            </a:pPr>
+            <a:r>
+              <a:rPr sz="1500">
+                <a:solidFill>
+                  <a:srgbClr val="22282E"/>
+                </a:solidFill>
+              </a:rPr>
+              <a:t>•  Implementa un descubrimiento de hosts que combine ARP (para la LAN) e ICMP (para hosts remotos) y explica cuándo usar cada uno.</a:t>
+            </a:r>
+          </a:p>
+          <a:p>
+            <a:pPr>
+              <a:spcAft>
+                <a:spcPts val="600"/>
+              </a:spcAft>
+            </a:pPr>
+            <a:r>
+              <a:rPr sz="1500">
+                <a:solidFill>
+                  <a:srgbClr val="22282E"/>
+                </a:solidFill>
+              </a:rPr>
+              <a:t>•  Captura 20 paquetes con sniff y extrae con Scapy la lista de IPs origen únicas.</a:t>
+            </a:r>
+          </a:p>
+          <a:p>
+            <a:pPr>
+              <a:spcAft>
+                <a:spcPts val="600"/>
+              </a:spcAft>
+            </a:pPr>
+            <a:r>
+              <a:rPr sz="1500">
+                <a:solidFill>
+                  <a:srgbClr val="22282E"/>
+                </a:solidFill>
+              </a:rPr>
+              <a:t>•  Forja un paquete UDP a un puerto DNS cerrado y analiza la respuesta ICMP Port Unreachable si la hay.</a:t>
+            </a:r>
+          </a:p>
+          <a:p>
+            <a:pPr>
+              <a:spcAft>
+                <a:spcPts val="600"/>
+              </a:spcAft>
+            </a:pPr>
+            <a:r>
+              <a:rPr sz="1500">
+                <a:solidFill>
+                  <a:srgbClr val="22282E"/>
+                </a:solidFill>
+              </a:rPr>
+              <a:t>•  Asegúrate de enviar siempre el RST tras un SYN-ACK y verifica en Wireshark que no dejas conexiones a medias.</a:t>
             </a:r>
           </a:p>
         </p:txBody>
@@ -3347,7 +3366,7 @@
                   <a:srgbClr val="0B3D2E"/>
                 </a:solidFill>
               </a:rPr>
-              <a:t>❓ Preguntas frecuentes</a:t>
+              <a:t>📝 Reto verificable</a:t>
             </a:r>
           </a:p>
         </p:txBody>
@@ -3385,52 +3404,22 @@
                   <a:srgbClr val="22282E"/>
                 </a:solidFill>
               </a:rPr>
-              <a:t>•  ❓ ¿Para qué usar Scapy si existe nmap? Scapy da control total del paquete: puedes forjar cabeceras arbitrarias, probar comportamientos anómalos y construir herramientas a medida que nmap no cubre. Es didáctico y flexible.</a:t>
-            </a:r>
-          </a:p>
-          <a:p>
-            <a:pPr>
-              <a:spcAft>
-                <a:spcPts val="600"/>
-              </a:spcAft>
-            </a:pPr>
-            <a:r>
-              <a:rPr sz="1500">
-                <a:solidFill>
-                  <a:srgbClr val="22282E"/>
-                </a:solidFill>
-              </a:rPr>
-              <a:t>•  ❓ ¿Por qué necesita root? Enviar paquetes forjados requiere raw sockets, una operación privilegiada. Por eso también es una capacidad potente que debe usarse con responsabilidad.</a:t>
-            </a:r>
-          </a:p>
-          <a:p>
-            <a:pPr>
-              <a:spcAft>
-                <a:spcPts val="600"/>
-              </a:spcAft>
-            </a:pPr>
-            <a:r>
-              <a:rPr sz="1500">
-                <a:solidFill>
-                  <a:srgbClr val="22282E"/>
-                </a:solidFill>
-              </a:rPr>
-              <a:t>•  ❓ ¿Scapy sirve para defensa? Sí: prototipar detecciones, generar tráfico de prueba para un IDS, o analizar capturas. No es solo ofensivo.</a:t>
-            </a:r>
-          </a:p>
-          <a:p>
-            <a:pPr>
-              <a:spcAft>
-                <a:spcPts val="600"/>
-              </a:spcAft>
-            </a:pPr>
-            <a:r>
-              <a:rPr sz="1500">
-                <a:solidFill>
-                  <a:srgbClr val="22282E"/>
-                </a:solidFill>
-              </a:rPr>
-              <a:t>•  ❓ ¿Puedo hacer sniffing sin promiscuo? Verás tu propio tráfico, pero para capturar el de otros hosts en una LAN conmutada necesitarías port mirroring o MITM (y autorización). Recuerda el marco legal.</a:t>
+              <a:t>•  Implementa scapyscan.py, un escáner SYN con Scapy que reciba un objetivo y una lista de puertos, clasifique cada puerto como abierto, cerrado o filtrado según la respuesta, cierre con RST los que…</a:t>
+            </a:r>
+          </a:p>
+          <a:p>
+            <a:pPr>
+              <a:spcAft>
+                <a:spcPts val="600"/>
+              </a:spcAft>
+            </a:pPr>
+            <a:r>
+              <a:rPr sz="1500">
+                <a:solidFill>
+                  <a:srgbClr val="22282E"/>
+                </a:solidFill>
+              </a:rPr>
+              <a:t>•  Criterio de aceptación: el clasificador coincide con nmap -sS sobre los mismos puertos de tu VM víctima (abierto/cerrado/filtrado); en Wireshark se observa el patrón SYN → SYN-ACK → RST para los…</a:t>
             </a:r>
           </a:p>
         </p:txBody>
@@ -3481,7 +3470,7 @@
                   <a:srgbClr val="0B3D2E"/>
                 </a:solidFill>
               </a:rPr>
-              <a:t>🔗 Referencias</a:t>
+              <a:t>⚠️ Errores comunes</a:t>
             </a:r>
           </a:p>
         </p:txBody>
@@ -3519,56 +3508,534 @@
                   <a:srgbClr val="22282E"/>
                 </a:solidFill>
               </a:rPr>
-              <a:t>•  Scapy Documentation — &lt;https://scapy.readthedocs.io/&gt;</a:t>
-            </a:r>
-          </a:p>
-          <a:p>
-            <a:pPr>
-              <a:spcAft>
-                <a:spcPts val="600"/>
-              </a:spcAft>
-            </a:pPr>
-            <a:r>
-              <a:rPr sz="1500">
-                <a:solidFill>
-                  <a:srgbClr val="22282E"/>
-                </a:solidFill>
-              </a:rPr>
-              <a:t>•  Seitz &amp; Arnold, Black Hat Python (cap. de Scapy).</a:t>
-            </a:r>
-          </a:p>
-          <a:p>
-            <a:pPr>
-              <a:spcAft>
-                <a:spcPts val="600"/>
-              </a:spcAft>
-            </a:pPr>
-            <a:r>
-              <a:rPr sz="1500">
-                <a:solidFill>
-                  <a:srgbClr val="22282E"/>
-                </a:solidFill>
-              </a:rPr>
-              <a:t>•  BPF filter syntax — &lt;https://biot.com/capstats/bpf.html&gt;</a:t>
-            </a:r>
-          </a:p>
-          <a:p>
-            <a:pPr>
-              <a:spcAft>
-                <a:spcPts val="600"/>
-              </a:spcAft>
-            </a:pPr>
-            <a:r>
-              <a:rPr sz="1500">
-                <a:solidFill>
-                  <a:srgbClr val="22282E"/>
-                </a:solidFill>
-              </a:rPr>
-              <a:t>•  Nmap vs. Scapy (comparativa didáctica) — &lt;https://nmap.org/book/&gt;</a:t>
-            </a:r>
-          </a:p>
-        </p:txBody>
-      </p:sp>
+              <a:t>•  PermissionError / no envía nada — Scapy necesita root para raw sockets. Ejecuta con sudo.</a:t>
+            </a:r>
+          </a:p>
+          <a:p>
+            <a:pPr>
+              <a:spcAft>
+                <a:spcPts val="600"/>
+              </a:spcAft>
+            </a:pPr>
+            <a:r>
+              <a:rPr sz="1500">
+                <a:solidFill>
+                  <a:srgbClr val="22282E"/>
+                </a:solidFill>
+              </a:rPr>
+              <a:t>•  Interfaz equivocada — Scapy usa la ruta por defecto. Especifica iface= si tienes varias NIC.</a:t>
+            </a:r>
+          </a:p>
+          <a:p>
+            <a:pPr>
+              <a:spcAft>
+                <a:spcPts val="600"/>
+              </a:spcAft>
+            </a:pPr>
+            <a:r>
+              <a:rPr sz="1500">
+                <a:solidFill>
+                  <a:srgbClr val="22282E"/>
+                </a:solidFill>
+              </a:rPr>
+              <a:t>•  sr1 devuelve None siempre — Timeout demasiado corto o host filtrado. Sube el timeout y verifica conectividad con un ping.</a:t>
+            </a:r>
+          </a:p>
+          <a:p>
+            <a:pPr>
+              <a:spcAft>
+                <a:spcPts val="600"/>
+              </a:spcAft>
+            </a:pPr>
+            <a:r>
+              <a:rPr sz="1500">
+                <a:solidFill>
+                  <a:srgbClr val="22282E"/>
+                </a:solidFill>
+              </a:rPr>
+              <a:t>•  Los paquetes no aparecen en Wireshark — Filtro mal escrito o interfaz incorrecta. Ajusta el filtro y la NIC en Wireshark.</a:t>
+            </a:r>
+          </a:p>
+          <a:p>
+            <a:pPr>
+              <a:spcAft>
+                <a:spcPts val="600"/>
+              </a:spcAft>
+            </a:pPr>
+            <a:r>
+              <a:rPr sz="1500">
+                <a:solidFill>
+                  <a:srgbClr val="22282E"/>
+                </a:solidFill>
+              </a:rPr>
+              <a:t>•  El SYN scan deja conexiones a medias — No enviaste el RST. Cierra tú la conexión tras recibir el SYN-ACK.</a:t>
+            </a:r>
+          </a:p>
+          <a:p>
+            <a:pPr>
+              <a:spcAft>
+                <a:spcPts val="600"/>
+              </a:spcAft>
+            </a:pPr>
+            <a:r>
+              <a:rPr sz="1500">
+                <a:solidFill>
+                  <a:srgbClr val="22282E"/>
+                </a:solidFill>
+              </a:rPr>
+              <a:t>•  Comparación de flags que nunca cuadra — Comparas el objeto flags como cadena. Compara con el entero (r[TCP].flags == 0x12) o con "SA".</a:t>
+            </a:r>
+          </a:p>
+        </p:txBody>
+      </p:sp>
+    </p:spTree>
+  </p:cSld>
+  <p:clrMapOvr>
+    <a:masterClrMapping/>
+  </p:clrMapOvr>
+</p:sld>
+</file>
+
+<file path=ppt/slides/slide13.xml><?xml version="1.0" encoding="utf-8"?>
+<p:sld xmlns:a="http://schemas.openxmlformats.org/drawingml/2006/main" xmlns:p="http://schemas.openxmlformats.org/presentationml/2006/main" xmlns:r="http://schemas.openxmlformats.org/officeDocument/2006/relationships">
+  <p:cSld>
+    <p:spTree>
+      <p:nvGrpSpPr>
+        <p:cNvPr id="1" name=""/>
+        <p:cNvGrpSpPr/>
+        <p:nvPr/>
+      </p:nvGrpSpPr>
+      <p:grpSpPr/>
+      <p:sp>
+        <p:nvSpPr>
+          <p:cNvPr id="2" name="TextBox 1"/>
+          <p:cNvSpPr txBox="1"/>
+          <p:nvPr/>
+        </p:nvSpPr>
+        <p:spPr>
+          <a:xfrm>
+            <a:off x="457200" y="320040"/>
+            <a:ext cx="8229600" cy="822960"/>
+          </a:xfrm>
+          <a:prstGeom prst="rect">
+            <a:avLst/>
+          </a:prstGeom>
+          <a:noFill/>
+        </p:spPr>
+        <p:txBody>
+          <a:bodyPr wrap="square">
+            <a:spAutoFit/>
+          </a:bodyPr>
+          <a:lstStyle/>
+          <a:p>
+            <a:r>
+              <a:rPr sz="2600" b="1">
+                <a:solidFill>
+                  <a:srgbClr val="0B3D2E"/>
+                </a:solidFill>
+              </a:rPr>
+              <a:t>❓ Preguntas frecuentes</a:t>
+            </a:r>
+          </a:p>
+        </p:txBody>
+      </p:sp>
+      <p:sp>
+        <p:nvSpPr>
+          <p:cNvPr id="3" name="TextBox 2"/>
+          <p:cNvSpPr txBox="1"/>
+          <p:nvPr/>
+        </p:nvSpPr>
+        <p:spPr>
+          <a:xfrm>
+            <a:off x="457200" y="1280160"/>
+            <a:ext cx="8229600" cy="4937760"/>
+          </a:xfrm>
+          <a:prstGeom prst="rect">
+            <a:avLst/>
+          </a:prstGeom>
+          <a:noFill/>
+        </p:spPr>
+        <p:txBody>
+          <a:bodyPr wrap="square">
+            <a:spAutoFit/>
+          </a:bodyPr>
+          <a:lstStyle/>
+          <a:p>
+            <a:pPr>
+              <a:spcAft>
+                <a:spcPts val="600"/>
+              </a:spcAft>
+            </a:pPr>
+            <a:r>
+              <a:rPr sz="1500">
+                <a:solidFill>
+                  <a:srgbClr val="22282E"/>
+                </a:solidFill>
+              </a:rPr>
+              <a:t>•  ❓ ¿Para qué usar Scapy si existe nmap? Scapy da control total del paquete: puedes forjar cabeceras arbitrarias, probar comportamientos anómalos y construir herramientas a medida que nmap no cubre. Es…</a:t>
+            </a:r>
+          </a:p>
+          <a:p>
+            <a:pPr>
+              <a:spcAft>
+                <a:spcPts val="600"/>
+              </a:spcAft>
+            </a:pPr>
+            <a:r>
+              <a:rPr sz="1500">
+                <a:solidFill>
+                  <a:srgbClr val="22282E"/>
+                </a:solidFill>
+              </a:rPr>
+              <a:t>•  ❓ ¿Por qué necesita root? Enviar paquetes forjados requiere raw sockets, una operación privilegiada porque permite fabricar tráfico arbitrario. Esa misma potencia obliga a usarlo con responsabilidad.</a:t>
+            </a:r>
+          </a:p>
+          <a:p>
+            <a:pPr>
+              <a:spcAft>
+                <a:spcPts val="600"/>
+              </a:spcAft>
+            </a:pPr>
+            <a:r>
+              <a:rPr sz="1500">
+                <a:solidFill>
+                  <a:srgbClr val="22282E"/>
+                </a:solidFill>
+              </a:rPr>
+              <a:t>•  ❓ ¿Scapy sirve para defensa? Sí: prototipar detecciones, generar tráfico de prueba controlado para validar un IDS, o analizar capturas guardadas. No es una herramienta solo ofensiva.</a:t>
+            </a:r>
+          </a:p>
+          <a:p>
+            <a:pPr>
+              <a:spcAft>
+                <a:spcPts val="600"/>
+              </a:spcAft>
+            </a:pPr>
+            <a:r>
+              <a:rPr sz="1500">
+                <a:solidFill>
+                  <a:srgbClr val="22282E"/>
+                </a:solidFill>
+              </a:rPr>
+              <a:t>•  ❓ ¿Puedo hacer sniffing sin modo promiscuo? Verás tu propio tráfico, pero para capturar el de otros hosts en una LAN conmutada necesitarías port mirroring o un MITM (y la autorización…</a:t>
+            </a:r>
+          </a:p>
+        </p:txBody>
+      </p:sp>
+    </p:spTree>
+  </p:cSld>
+  <p:clrMapOvr>
+    <a:masterClrMapping/>
+  </p:clrMapOvr>
+</p:sld>
+</file>
+
+<file path=ppt/slides/slide14.xml><?xml version="1.0" encoding="utf-8"?>
+<p:sld xmlns:a="http://schemas.openxmlformats.org/drawingml/2006/main" xmlns:p="http://schemas.openxmlformats.org/presentationml/2006/main" xmlns:r="http://schemas.openxmlformats.org/officeDocument/2006/relationships">
+  <p:cSld>
+    <p:spTree>
+      <p:nvGrpSpPr>
+        <p:cNvPr id="1" name=""/>
+        <p:cNvGrpSpPr/>
+        <p:nvPr/>
+      </p:nvGrpSpPr>
+      <p:grpSpPr/>
+      <p:sp>
+        <p:nvSpPr>
+          <p:cNvPr id="2" name="TextBox 1"/>
+          <p:cNvSpPr txBox="1"/>
+          <p:nvPr/>
+        </p:nvSpPr>
+        <p:spPr>
+          <a:xfrm>
+            <a:off x="457200" y="320040"/>
+            <a:ext cx="8229600" cy="822960"/>
+          </a:xfrm>
+          <a:prstGeom prst="rect">
+            <a:avLst/>
+          </a:prstGeom>
+          <a:noFill/>
+        </p:spPr>
+        <p:txBody>
+          <a:bodyPr wrap="square">
+            <a:spAutoFit/>
+          </a:bodyPr>
+          <a:lstStyle/>
+          <a:p>
+            <a:r>
+              <a:rPr sz="2600" b="1">
+                <a:solidFill>
+                  <a:srgbClr val="0B3D2E"/>
+                </a:solidFill>
+              </a:rPr>
+              <a:t>🔗 Referencias</a:t>
+            </a:r>
+          </a:p>
+        </p:txBody>
+      </p:sp>
+      <p:sp>
+        <p:nvSpPr>
+          <p:cNvPr id="3" name="TextBox 2"/>
+          <p:cNvSpPr txBox="1"/>
+          <p:nvPr/>
+        </p:nvSpPr>
+        <p:spPr>
+          <a:xfrm>
+            <a:off x="457200" y="1280160"/>
+            <a:ext cx="8229600" cy="4937760"/>
+          </a:xfrm>
+          <a:prstGeom prst="rect">
+            <a:avLst/>
+          </a:prstGeom>
+          <a:noFill/>
+        </p:spPr>
+        <p:txBody>
+          <a:bodyPr wrap="square">
+            <a:spAutoFit/>
+          </a:bodyPr>
+          <a:lstStyle/>
+          <a:p>
+            <a:pPr>
+              <a:spcAft>
+                <a:spcPts val="600"/>
+              </a:spcAft>
+            </a:pPr>
+            <a:r>
+              <a:rPr sz="1500">
+                <a:solidFill>
+                  <a:srgbClr val="22282E"/>
+                </a:solidFill>
+              </a:rPr>
+              <a:t>•  Scapy, documentación oficial — &lt;https://scapy.readthedocs.io/&gt;</a:t>
+            </a:r>
+          </a:p>
+          <a:p>
+            <a:pPr>
+              <a:spcAft>
+                <a:spcPts val="600"/>
+              </a:spcAft>
+            </a:pPr>
+            <a:r>
+              <a:rPr sz="1500">
+                <a:solidFill>
+                  <a:srgbClr val="22282E"/>
+                </a:solidFill>
+              </a:rPr>
+              <a:t>•  Seitz &amp; Arnold, Black Hat Python (2ª ed.), capítulo sobre Scapy.</a:t>
+            </a:r>
+          </a:p>
+          <a:p>
+            <a:pPr>
+              <a:spcAft>
+                <a:spcPts val="600"/>
+              </a:spcAft>
+            </a:pPr>
+            <a:r>
+              <a:rPr sz="1500">
+                <a:solidFill>
+                  <a:srgbClr val="22282E"/>
+                </a:solidFill>
+              </a:rPr>
+              <a:t>•  Nmap, Port Scanning Techniques (SYN scan) — &lt;https://nmap.org/book/synscan.html&gt;</a:t>
+            </a:r>
+          </a:p>
+          <a:p>
+            <a:pPr>
+              <a:spcAft>
+                <a:spcPts val="600"/>
+              </a:spcAft>
+            </a:pPr>
+            <a:r>
+              <a:rPr sz="1500">
+                <a:solidFill>
+                  <a:srgbClr val="22282E"/>
+                </a:solidFill>
+              </a:rPr>
+              <a:t>•  RFC 826, Address Resolution Protocol (ARP) — &lt;https://www.rfc-editor.org/rfc/rfc826&gt;</a:t>
+            </a:r>
+          </a:p>
+          <a:p>
+            <a:pPr>
+              <a:spcAft>
+                <a:spcPts val="600"/>
+              </a:spcAft>
+            </a:pPr>
+            <a:r>
+              <a:rPr sz="1500">
+                <a:solidFill>
+                  <a:srgbClr val="22282E"/>
+                </a:solidFill>
+              </a:rPr>
+              <a:t>•  RFC 792, Internet Control Message Protocol (ICMP) — &lt;https://www.rfc-editor.org/rfc/rfc792&gt;</a:t>
+            </a:r>
+          </a:p>
+          <a:p>
+            <a:pPr>
+              <a:spcAft>
+                <a:spcPts val="600"/>
+              </a:spcAft>
+            </a:pPr>
+            <a:r>
+              <a:rPr sz="1500">
+                <a:solidFill>
+                  <a:srgbClr val="22282E"/>
+                </a:solidFill>
+              </a:rPr>
+              <a:t>•  BPF filter syntax (sintaxis de los filtros de captura que acepta sniff) — &lt;https://biot.com/capstats/bpf.html&gt;</a:t>
+            </a:r>
+          </a:p>
+        </p:txBody>
+      </p:sp>
+    </p:spTree>
+  </p:cSld>
+  <p:clrMapOvr>
+    <a:masterClrMapping/>
+  </p:clrMapOvr>
+</p:sld>
+</file>
+
+<file path=ppt/slides/slide15.xml><?xml version="1.0" encoding="utf-8"?>
+<p:sld xmlns:a="http://schemas.openxmlformats.org/drawingml/2006/main" xmlns:p="http://schemas.openxmlformats.org/presentationml/2006/main" xmlns:r="http://schemas.openxmlformats.org/officeDocument/2006/relationships">
+  <p:cSld>
+    <p:spTree>
+      <p:nvGrpSpPr>
+        <p:cNvPr id="1" name=""/>
+        <p:cNvGrpSpPr/>
+        <p:nvPr/>
+      </p:nvGrpSpPr>
+      <p:grpSpPr/>
+      <p:sp>
+        <p:nvSpPr>
+          <p:cNvPr id="2" name="TextBox 1"/>
+          <p:cNvSpPr txBox="1"/>
+          <p:nvPr/>
+        </p:nvSpPr>
+        <p:spPr>
+          <a:xfrm>
+            <a:off x="457200" y="274320"/>
+            <a:ext cx="8229600" cy="640080"/>
+          </a:xfrm>
+          <a:prstGeom prst="rect">
+            <a:avLst/>
+          </a:prstGeom>
+          <a:noFill/>
+        </p:spPr>
+        <p:txBody>
+          <a:bodyPr wrap="square">
+            <a:spAutoFit/>
+          </a:bodyPr>
+          <a:lstStyle/>
+          <a:p>
+            <a:r>
+              <a:rPr sz="2200" b="1">
+                <a:solidFill>
+                  <a:srgbClr val="0B3D2E"/>
+                </a:solidFill>
+              </a:rPr>
+              <a:t>Diagrama 1</a:t>
+            </a:r>
+          </a:p>
+        </p:txBody>
+      </p:sp>
+      <p:pic>
+        <p:nvPicPr>
+          <p:cNvPr id="3" name="Picture 2" descr="a0bb653335dd7fb6.png"/>
+          <p:cNvPicPr>
+            <a:picLocks noChangeAspect="1"/>
+          </p:cNvPicPr>
+          <p:nvPr/>
+        </p:nvPicPr>
+        <p:blipFill>
+          <a:blip r:embed="rId2"/>
+          <a:stretch>
+            <a:fillRect/>
+          </a:stretch>
+        </p:blipFill>
+        <p:spPr>
+          <a:xfrm>
+            <a:off x="2319668" y="1097280"/>
+            <a:ext cx="4504663" cy="5303520"/>
+          </a:xfrm>
+          <a:prstGeom prst="rect">
+            <a:avLst/>
+          </a:prstGeom>
+        </p:spPr>
+      </p:pic>
+    </p:spTree>
+  </p:cSld>
+  <p:clrMapOvr>
+    <a:masterClrMapping/>
+  </p:clrMapOvr>
+</p:sld>
+</file>
+
+<file path=ppt/slides/slide16.xml><?xml version="1.0" encoding="utf-8"?>
+<p:sld xmlns:a="http://schemas.openxmlformats.org/drawingml/2006/main" xmlns:p="http://schemas.openxmlformats.org/presentationml/2006/main" xmlns:r="http://schemas.openxmlformats.org/officeDocument/2006/relationships">
+  <p:cSld>
+    <p:spTree>
+      <p:nvGrpSpPr>
+        <p:cNvPr id="1" name=""/>
+        <p:cNvGrpSpPr/>
+        <p:nvPr/>
+      </p:nvGrpSpPr>
+      <p:grpSpPr/>
+      <p:sp>
+        <p:nvSpPr>
+          <p:cNvPr id="2" name="TextBox 1"/>
+          <p:cNvSpPr txBox="1"/>
+          <p:nvPr/>
+        </p:nvSpPr>
+        <p:spPr>
+          <a:xfrm>
+            <a:off x="457200" y="274320"/>
+            <a:ext cx="8229600" cy="640080"/>
+          </a:xfrm>
+          <a:prstGeom prst="rect">
+            <a:avLst/>
+          </a:prstGeom>
+          <a:noFill/>
+        </p:spPr>
+        <p:txBody>
+          <a:bodyPr wrap="square">
+            <a:spAutoFit/>
+          </a:bodyPr>
+          <a:lstStyle/>
+          <a:p>
+            <a:r>
+              <a:rPr sz="2200" b="1">
+                <a:solidFill>
+                  <a:srgbClr val="0B3D2E"/>
+                </a:solidFill>
+              </a:rPr>
+              <a:t>Diagrama 2</a:t>
+            </a:r>
+          </a:p>
+        </p:txBody>
+      </p:sp>
+      <p:pic>
+        <p:nvPicPr>
+          <p:cNvPr id="3" name="Picture 2" descr="3172bd7d6db32e45.png"/>
+          <p:cNvPicPr>
+            <a:picLocks noChangeAspect="1"/>
+          </p:cNvPicPr>
+          <p:nvPr/>
+        </p:nvPicPr>
+        <p:blipFill>
+          <a:blip r:embed="rId2"/>
+          <a:stretch>
+            <a:fillRect/>
+          </a:stretch>
+        </p:blipFill>
+        <p:spPr>
+          <a:xfrm>
+            <a:off x="457200" y="1694791"/>
+            <a:ext cx="8229600" cy="4108498"/>
+          </a:xfrm>
+          <a:prstGeom prst="rect">
+            <a:avLst/>
+          </a:prstGeom>
+        </p:spPr>
+      </p:pic>
     </p:spTree>
   </p:cSld>
   <p:clrMapOvr>
@@ -3653,7 +4120,7 @@
                   <a:srgbClr val="22282E"/>
                 </a:solidFill>
               </a:rPr>
-              <a:t>•  Construir, enviar, capturar y diseccionar paquetes de red a bajo nivel con Scapy. Al terminar podrás forjar paquetes capa por capa, implementar tu propio ping y SYN scan, esnifar tráfico y automatizar pruebas de red, uniendo todo lo aprendido sobre TCP/IP y Python.</a:t>
+              <a:t>•  Construir, enviar, capturar y diseccionar paquetes de red a bajo nivel con Scapy, controlando cada campo de cada cabecera en lugar de depender de lo que el sistema operativo decida por ti. Al…</a:t>
             </a:r>
           </a:p>
         </p:txBody>
@@ -3757,67 +4224,82 @@
                   <a:srgbClr val="22282E"/>
                 </a:solidFill>
               </a:rPr>
-              <a:t>•  Forjar paquetes especificando cada capa (Ether/IP/TCP/UDP/ICMP).</a:t>
-            </a:r>
-          </a:p>
-          <a:p>
-            <a:pPr>
-              <a:spcAft>
-                <a:spcPts val="600"/>
-              </a:spcAft>
-            </a:pPr>
-            <a:r>
-              <a:rPr sz="1500">
-                <a:solidFill>
-                  <a:srgbClr val="22282E"/>
-                </a:solidFill>
-              </a:rPr>
-              <a:t>•  Enviar y recibir paquetes con send, sr, sr1, srp.</a:t>
-            </a:r>
-          </a:p>
-          <a:p>
-            <a:pPr>
-              <a:spcAft>
-                <a:spcPts val="600"/>
-              </a:spcAft>
-            </a:pPr>
-            <a:r>
-              <a:rPr sz="1500">
-                <a:solidFill>
-                  <a:srgbClr val="22282E"/>
-                </a:solidFill>
-              </a:rPr>
-              <a:t>•  Esnifar tráfico y aplicar filtros BPF.</a:t>
-            </a:r>
-          </a:p>
-          <a:p>
-            <a:pPr>
-              <a:spcAft>
-                <a:spcPts val="600"/>
-              </a:spcAft>
-            </a:pPr>
-            <a:r>
-              <a:rPr sz="1500">
-                <a:solidFill>
-                  <a:srgbClr val="22282E"/>
-                </a:solidFill>
-              </a:rPr>
-              <a:t>•  Implementar un SYN scan y un descubrimiento de hosts.</a:t>
-            </a:r>
-          </a:p>
-          <a:p>
-            <a:pPr>
-              <a:spcAft>
-                <a:spcPts val="600"/>
-              </a:spcAft>
-            </a:pPr>
-            <a:r>
-              <a:rPr sz="1500">
-                <a:solidFill>
-                  <a:srgbClr val="22282E"/>
-                </a:solidFill>
-              </a:rPr>
-              <a:t>•  Diseccionar respuestas para inferir estado y servicios.</a:t>
+              <a:t>•  Forjar paquetes especificando cada capa (Ether, IP, TCP, UDP, ICMP) con el operador /.</a:t>
+            </a:r>
+          </a:p>
+          <a:p>
+            <a:pPr>
+              <a:spcAft>
+                <a:spcPts val="600"/>
+              </a:spcAft>
+            </a:pPr>
+            <a:r>
+              <a:rPr sz="1500">
+                <a:solidFill>
+                  <a:srgbClr val="22282E"/>
+                </a:solidFill>
+              </a:rPr>
+              <a:t>•  Enviar y recibir paquetes con send, sr, sr1 y srp, distinguiendo capa 2 de capa 3.</a:t>
+            </a:r>
+          </a:p>
+          <a:p>
+            <a:pPr>
+              <a:spcAft>
+                <a:spcPts val="600"/>
+              </a:spcAft>
+            </a:pPr>
+            <a:r>
+              <a:rPr sz="1500">
+                <a:solidFill>
+                  <a:srgbClr val="22282E"/>
+                </a:solidFill>
+              </a:rPr>
+              <a:t>•  Esnifar tráfico en vivo y aplicar filtros BPF para reducir el ruido.</a:t>
+            </a:r>
+          </a:p>
+          <a:p>
+            <a:pPr>
+              <a:spcAft>
+                <a:spcPts val="600"/>
+              </a:spcAft>
+            </a:pPr>
+            <a:r>
+              <a:rPr sz="1500">
+                <a:solidFill>
+                  <a:srgbClr val="22282E"/>
+                </a:solidFill>
+              </a:rPr>
+              <a:t>•  Implementar un SYN scan half-open y un descubrimiento de hosts por ARP e ICMP.</a:t>
+            </a:r>
+          </a:p>
+          <a:p>
+            <a:pPr>
+              <a:spcAft>
+                <a:spcPts val="600"/>
+              </a:spcAft>
+            </a:pPr>
+            <a:r>
+              <a:rPr sz="1500">
+                <a:solidFill>
+                  <a:srgbClr val="22282E"/>
+                </a:solidFill>
+              </a:rPr>
+              <a:t>•  Diseccionar las respuestas para inferir el estado de un puerto y la presencia de un host.</a:t>
+            </a:r>
+          </a:p>
+          <a:p>
+            <a:pPr>
+              <a:spcAft>
+                <a:spcPts val="600"/>
+              </a:spcAft>
+            </a:pPr>
+            <a:r>
+              <a:rPr sz="1500">
+                <a:solidFill>
+                  <a:srgbClr val="22282E"/>
+                </a:solidFill>
+              </a:rPr>
+              <a:t>•  Verificar con Wireshark que los paquetes forjados salen exactamente como los diseñaste.</a:t>
             </a:r>
           </a:p>
         </p:txBody>
@@ -3996,7 +4478,7 @@
                   <a:srgbClr val="22282E"/>
                 </a:solidFill>
               </a:rPr>
-              <a:t>•  7 — ARP/ICMP</a:t>
+              <a:t>•  7 — ARP e ICMP</a:t>
             </a:r>
           </a:p>
         </p:txBody>
@@ -4047,7 +4529,7 @@
                   <a:srgbClr val="0B3D2E"/>
                 </a:solidFill>
               </a:rPr>
-              <a:t>📖 Definiciones y características</a:t>
+              <a:t>🧠 Explicación en profundidad</a:t>
             </a:r>
           </a:p>
         </p:txBody>
@@ -4085,82 +4567,97 @@
                   <a:srgbClr val="22282E"/>
                 </a:solidFill>
               </a:rPr>
-              <a:t>•  Scapy: librería Python para forjar/capturar paquetes. Clave: IP()/TCP() apila capas con el operador /.</a:t>
-            </a:r>
-          </a:p>
-          <a:p>
-            <a:pPr>
-              <a:spcAft>
-                <a:spcPts val="600"/>
-              </a:spcAft>
-            </a:pPr>
-            <a:r>
-              <a:rPr sz="1500">
-                <a:solidFill>
-                  <a:srgbClr val="22282E"/>
-                </a:solidFill>
-              </a:rPr>
-              <a:t>•  sr1(): envía un paquete y devuelve la primera respuesta. Clave: ideal para sondas puntuales (ping, un puerto).</a:t>
-            </a:r>
-          </a:p>
-          <a:p>
-            <a:pPr>
-              <a:spcAft>
-                <a:spcPts val="600"/>
-              </a:spcAft>
-            </a:pPr>
-            <a:r>
-              <a:rPr sz="1500">
-                <a:solidFill>
-                  <a:srgbClr val="22282E"/>
-                </a:solidFill>
-              </a:rPr>
-              <a:t>•  srp(): como sr pero a nivel de capa 2 (Ethernet). Clave: necesario para ARP.</a:t>
-            </a:r>
-          </a:p>
-          <a:p>
-            <a:pPr>
-              <a:spcAft>
-                <a:spcPts val="600"/>
-              </a:spcAft>
-            </a:pPr>
-            <a:r>
-              <a:rPr sz="1500">
-                <a:solidFill>
-                  <a:srgbClr val="22282E"/>
-                </a:solidFill>
-              </a:rPr>
-              <a:t>•  Filtro BPF: sintaxis de filtrado en captura (tcp port 80). Clave: evita procesar tráfico irrelevante.</a:t>
-            </a:r>
-          </a:p>
-          <a:p>
-            <a:pPr>
-              <a:spcAft>
-                <a:spcPts val="600"/>
-              </a:spcAft>
-            </a:pPr>
-            <a:r>
-              <a:rPr sz="1500">
-                <a:solidFill>
-                  <a:srgbClr val="22282E"/>
-                </a:solidFill>
-              </a:rPr>
-              <a:t>•  SYN scan con Scapy: enviar un SYN y clasificar según la respuesta (SYN-ACK=abierto, RST=cerrado). Clave: implementa a mano lo visto en la Clase 011.</a:t>
-            </a:r>
-          </a:p>
-          <a:p>
-            <a:pPr>
-              <a:spcAft>
-                <a:spcPts val="600"/>
-              </a:spcAft>
-            </a:pPr>
-            <a:r>
-              <a:rPr sz="1500">
-                <a:solidFill>
-                  <a:srgbClr val="22282E"/>
-                </a:solidFill>
-              </a:rPr>
-              <a:t>•  Raw sockets: acceso de bajo nivel que Scapy usa por debajo. Clave: requiere privilegios de root.</a:t>
+              <a:t>•  La idea central de Scapy es que un paquete es una pila de capas y que apilarlas es tan sencillo como dividir con el operador /. Cuando escribes IP(dst="10.10.10.6")/TCP(dport=22, flags="S"), no estás…</a:t>
+            </a:r>
+          </a:p>
+          <a:p>
+            <a:pPr>
+              <a:spcAft>
+                <a:spcPts val="600"/>
+              </a:spcAft>
+            </a:pPr>
+            <a:r>
+              <a:rPr sz="1500">
+                <a:solidFill>
+                  <a:srgbClr val="22282E"/>
+                </a:solidFill>
+              </a:rPr>
+              <a:t>•  Fíjate en qué capa es la más externa, porque de eso depende la función de envío que</a:t>
+            </a:r>
+          </a:p>
+          <a:p>
+            <a:pPr>
+              <a:spcAft>
+                <a:spcPts val="600"/>
+              </a:spcAft>
+            </a:pPr>
+            <a:r>
+              <a:rPr sz="1500">
+                <a:solidFill>
+                  <a:srgbClr val="22282E"/>
+                </a:solidFill>
+              </a:rPr>
+              <a:t>•  toca usar: si construyes desde Ether() estás fabricando la trama entera y se envía</a:t>
+            </a:r>
+          </a:p>
+          <a:p>
+            <a:pPr>
+              <a:spcAft>
+                <a:spcPts val="600"/>
+              </a:spcAft>
+            </a:pPr>
+            <a:r>
+              <a:rPr sz="1500">
+                <a:solidFill>
+                  <a:srgbClr val="22282E"/>
+                </a:solidFill>
+              </a:rPr>
+              <a:t>•  con sendp() a nivel 2; si empiezas en IP() dejas que el kernel resuelva la capa</a:t>
+            </a:r>
+          </a:p>
+          <a:p>
+            <a:pPr>
+              <a:spcAft>
+                <a:spcPts val="600"/>
+              </a:spcAft>
+            </a:pPr>
+            <a:r>
+              <a:rPr sz="1500">
+                <a:solidFill>
+                  <a:srgbClr val="22282E"/>
+                </a:solidFill>
+              </a:rPr>
+              <a:t>•  de enlace y se envía con send(). Confundir ambas es el error más frecuente al</a:t>
+            </a:r>
+          </a:p>
+          <a:p>
+            <a:pPr>
+              <a:spcAft>
+                <a:spcPts val="600"/>
+              </a:spcAft>
+            </a:pPr>
+            <a:r>
+              <a:rPr sz="1500">
+                <a:solidFill>
+                  <a:srgbClr val="22282E"/>
+                </a:solidFill>
+              </a:rPr>
+              <a:t>•  empezar con Scapy.</a:t>
+            </a:r>
+          </a:p>
+          <a:p>
+            <a:pPr>
+              <a:spcAft>
+                <a:spcPts val="600"/>
+              </a:spcAft>
+            </a:pPr>
+            <a:r>
+              <a:rPr sz="1500">
+                <a:solidFill>
+                  <a:srgbClr val="22282E"/>
+                </a:solidFill>
+              </a:rPr>
+              <a:t>•  Scapy ofrece una familia de funciones de envío cuya diferencia es sutil pero importante, y confundirlas es la causa más común de "no me responde nada". La distinción tiene dos ejes: si esperas…</a:t>
             </a:r>
           </a:p>
         </p:txBody>
@@ -4211,7 +4708,7 @@
                   <a:srgbClr val="0B3D2E"/>
                 </a:solidFill>
               </a:rPr>
-              <a:t>🧰 Herramientas y preparación</a:t>
+              <a:t>📖 Definiciones y características</a:t>
             </a:r>
           </a:p>
         </p:txBody>
@@ -4249,52 +4746,97 @@
                   <a:srgbClr val="22282E"/>
                 </a:solidFill>
               </a:rPr>
-              <a:t>•  Instala Scapy en tu entorno virtual de Kali:</a:t>
-            </a:r>
-          </a:p>
-          <a:p>
-            <a:pPr>
-              <a:spcAft>
-                <a:spcPts val="600"/>
-              </a:spcAft>
-            </a:pPr>
-            <a:r>
-              <a:rPr sz="1500">
-                <a:solidFill>
-                  <a:srgbClr val="22282E"/>
-                </a:solidFill>
-              </a:rPr>
-              <a:t>•  pip install scapy    # o: sudo apt install python3-scapy</a:t>
-            </a:r>
-          </a:p>
-          <a:p>
-            <a:pPr>
-              <a:spcAft>
-                <a:spcPts val="600"/>
-              </a:spcAft>
-            </a:pPr>
-            <a:r>
-              <a:rPr sz="1500">
-                <a:solidFill>
-                  <a:srgbClr val="22282E"/>
-                </a:solidFill>
-              </a:rPr>
-              <a:t>•  sudo scapy           # consola interactiva (necesita root para enviar)</a:t>
-            </a:r>
-          </a:p>
-          <a:p>
-            <a:pPr>
-              <a:spcAft>
-                <a:spcPts val="600"/>
-              </a:spcAft>
-            </a:pPr>
-            <a:r>
-              <a:rPr sz="1500">
-                <a:solidFill>
-                  <a:srgbClr val="22282E"/>
-                </a:solidFill>
-              </a:rPr>
-              <a:t>•  Trabaja siempre en la red interna del laboratorio. Ten Wireshark abierto en paralelo para verificar que tus paquetes forjados salen como esperas.</a:t>
+              <a:t>•  Scapy: librería de Python para forjar, enviar, capturar y diseccionar paquetes de red. Su rasgo distintivo es apilar capas con el operador / (IP()/TCP()) y rellenar automáticamente los campos que no…</a:t>
+            </a:r>
+          </a:p>
+          <a:p>
+            <a:pPr>
+              <a:spcAft>
+                <a:spcPts val="600"/>
+              </a:spcAft>
+            </a:pPr>
+            <a:r>
+              <a:rPr sz="1500">
+                <a:solidFill>
+                  <a:srgbClr val="22282E"/>
+                </a:solidFill>
+              </a:rPr>
+              <a:t>•  Capa (layer): cada nivel del paquete (Ether, IP, TCP, UDP, ICMP) modelado como un objeto Python con sus campos. Se accede a una capa concreta con pkt[TCP] y se comprueba su presencia con haslayer().</a:t>
+            </a:r>
+          </a:p>
+          <a:p>
+            <a:pPr>
+              <a:spcAft>
+                <a:spcPts val="600"/>
+              </a:spcAft>
+            </a:pPr>
+            <a:r>
+              <a:rPr sz="1500">
+                <a:solidFill>
+                  <a:srgbClr val="22282E"/>
+                </a:solidFill>
+              </a:rPr>
+              <a:t>•  sr1(): envía un paquete de capa 3 y devuelve únicamente la primera respuesta. Es la elección natural para sondas puntuales como un ping o el sondeo de un solo puerto.</a:t>
+            </a:r>
+          </a:p>
+          <a:p>
+            <a:pPr>
+              <a:spcAft>
+                <a:spcPts val="600"/>
+              </a:spcAft>
+            </a:pPr>
+            <a:r>
+              <a:rPr sz="1500">
+                <a:solidFill>
+                  <a:srgbClr val="22282E"/>
+                </a:solidFill>
+              </a:rPr>
+              <a:t>•  sr(): envía en capa 3 y devuelve dos conjuntos, respondidos y no respondidos. Útil para escanear muchos puertos u hosts de una vez.</a:t>
+            </a:r>
+          </a:p>
+          <a:p>
+            <a:pPr>
+              <a:spcAft>
+                <a:spcPts val="600"/>
+              </a:spcAft>
+            </a:pPr>
+            <a:r>
+              <a:rPr sz="1500">
+                <a:solidFill>
+                  <a:srgbClr val="22282E"/>
+                </a:solidFill>
+              </a:rPr>
+              <a:t>•  srp(): equivalente a sr pero en capa 2 (Ethernet), imprescindible para ARP porque necesitas forjar la trama con la MAC de broadcast.</a:t>
+            </a:r>
+          </a:p>
+          <a:p>
+            <a:pPr>
+              <a:spcAft>
+                <a:spcPts val="600"/>
+              </a:spcAft>
+            </a:pPr>
+            <a:r>
+              <a:rPr sz="1500">
+                <a:solidFill>
+                  <a:srgbClr val="22282E"/>
+                </a:solidFill>
+              </a:rPr>
+              <a:t>•  Filtro BPF: expresión de filtrado (tcp port 80, icmp) que el kernel aplica en captura para entregarte solo el tráfico relevante y ahorrar procesamiento.</a:t>
+            </a:r>
+          </a:p>
+          <a:p>
+            <a:pPr>
+              <a:spcAft>
+                <a:spcPts val="600"/>
+              </a:spcAft>
+            </a:pPr>
+            <a:r>
+              <a:rPr sz="1500">
+                <a:solidFill>
+                  <a:srgbClr val="22282E"/>
+                </a:solidFill>
+              </a:rPr>
+              <a:t>•  SYN scan (half-open): técnica que envía un SYN y clasifica el puerto según la respuesta (SYN-ACK = abierto, RST = cerrado, silencio = filtrado), abortando con RST sin completar el handshake.</a:t>
             </a:r>
           </a:p>
         </p:txBody>
@@ -4345,7 +4887,7 @@
                   <a:srgbClr val="0B3D2E"/>
                 </a:solidFill>
               </a:rPr>
-              <a:t>🧪 Laboratorio guiado</a:t>
+              <a:t>📔 Glosario</a:t>
             </a:r>
           </a:p>
         </p:txBody>
@@ -4383,97 +4925,97 @@
                   <a:srgbClr val="22282E"/>
                 </a:solidFill>
               </a:rPr>
-              <a:t>•  Forjar y ver un paquete:</a:t>
-            </a:r>
-          </a:p>
-          <a:p>
-            <a:pPr>
-              <a:spcAft>
-                <a:spcPts val="600"/>
-              </a:spcAft>
-            </a:pPr>
-            <a:r>
-              <a:rPr sz="1500">
-                <a:solidFill>
-                  <a:srgbClr val="22282E"/>
-                </a:solidFill>
-              </a:rPr>
-              <a:t>•  from scapy.all import</a:t>
-            </a:r>
-          </a:p>
-          <a:p>
-            <a:pPr>
-              <a:spcAft>
-                <a:spcPts val="600"/>
-              </a:spcAft>
-            </a:pPr>
-            <a:r>
-              <a:rPr sz="1500">
-                <a:solidFill>
-                  <a:srgbClr val="22282E"/>
-                </a:solidFill>
-              </a:rPr>
-              <a:t>•  pkt = IP(dst="10.10.10.6")/ICMP()</a:t>
-            </a:r>
-          </a:p>
-          <a:p>
-            <a:pPr>
-              <a:spcAft>
-                <a:spcPts val="600"/>
-              </a:spcAft>
-            </a:pPr>
-            <a:r>
-              <a:rPr sz="1500">
-                <a:solidFill>
-                  <a:srgbClr val="22282E"/>
-                </a:solidFill>
-              </a:rPr>
-              <a:t>•  pkt.show()</a:t>
-            </a:r>
-          </a:p>
-          <a:p>
-            <a:pPr>
-              <a:spcAft>
-                <a:spcPts val="600"/>
-              </a:spcAft>
-            </a:pPr>
-            <a:r>
-              <a:rPr sz="1500">
-                <a:solidFill>
-                  <a:srgbClr val="22282E"/>
-                </a:solidFill>
-              </a:rPr>
-              <a:t>•  Ping propio con sr1:</a:t>
-            </a:r>
-          </a:p>
-          <a:p>
-            <a:pPr>
-              <a:spcAft>
-                <a:spcPts val="600"/>
-              </a:spcAft>
-            </a:pPr>
-            <a:r>
-              <a:rPr sz="1500">
-                <a:solidFill>
-                  <a:srgbClr val="22282E"/>
-                </a:solidFill>
-              </a:rPr>
-              <a:t>•  resp = sr1(IP(dst="10.10.10.6")/ICMP(), timeout=2, verbose=0)</a:t>
-            </a:r>
-          </a:p>
-          <a:p>
-            <a:pPr>
-              <a:spcAft>
-                <a:spcPts val="600"/>
-              </a:spcAft>
-            </a:pPr>
-            <a:r>
-              <a:rPr sz="1500">
-                <a:solidFill>
-                  <a:srgbClr val="22282E"/>
-                </a:solidFill>
-              </a:rPr>
-              <a:t>•  print("Vivo" if resp else "Sin respuesta")</a:t>
+              <a:t>•  Término — Definición concisa</a:t>
+            </a:r>
+          </a:p>
+          <a:p>
+            <a:pPr>
+              <a:spcAft>
+                <a:spcPts val="600"/>
+              </a:spcAft>
+            </a:pPr>
+            <a:r>
+              <a:rPr sz="1500">
+                <a:solidFill>
+                  <a:srgbClr val="22282E"/>
+                </a:solidFill>
+              </a:rPr>
+              <a:t>•  Scapy — Librería Python de forja y análisis de paquetes</a:t>
+            </a:r>
+          </a:p>
+          <a:p>
+            <a:pPr>
+              <a:spcAft>
+                <a:spcPts val="600"/>
+              </a:spcAft>
+            </a:pPr>
+            <a:r>
+              <a:rPr sz="1500">
+                <a:solidFill>
+                  <a:srgbClr val="22282E"/>
+                </a:solidFill>
+              </a:rPr>
+              <a:t>•  Capa — Nivel del paquete (Ether/IP/TCP/UDP/ICMP) como objeto</a:t>
+            </a:r>
+          </a:p>
+          <a:p>
+            <a:pPr>
+              <a:spcAft>
+                <a:spcPts val="600"/>
+              </a:spcAft>
+            </a:pPr>
+            <a:r>
+              <a:rPr sz="1500">
+                <a:solidFill>
+                  <a:srgbClr val="22282E"/>
+                </a:solidFill>
+              </a:rPr>
+              <a:t>•  Operador / — Apila una capa dentro de otra en Scapy</a:t>
+            </a:r>
+          </a:p>
+          <a:p>
+            <a:pPr>
+              <a:spcAft>
+                <a:spcPts val="600"/>
+              </a:spcAft>
+            </a:pPr>
+            <a:r>
+              <a:rPr sz="1500">
+                <a:solidFill>
+                  <a:srgbClr val="22282E"/>
+                </a:solidFill>
+              </a:rPr>
+              <a:t>•  send — Envía paquetes de capa 3 sin esperar respuesta</a:t>
+            </a:r>
+          </a:p>
+          <a:p>
+            <a:pPr>
+              <a:spcAft>
+                <a:spcPts val="600"/>
+              </a:spcAft>
+            </a:pPr>
+            <a:r>
+              <a:rPr sz="1500">
+                <a:solidFill>
+                  <a:srgbClr val="22282E"/>
+                </a:solidFill>
+              </a:rPr>
+              <a:t>•  sr1 — Envía capa 3 y devuelve la primera respuesta</a:t>
+            </a:r>
+          </a:p>
+          <a:p>
+            <a:pPr>
+              <a:spcAft>
+                <a:spcPts val="600"/>
+              </a:spcAft>
+            </a:pPr>
+            <a:r>
+              <a:rPr sz="1500">
+                <a:solidFill>
+                  <a:srgbClr val="22282E"/>
+                </a:solidFill>
+              </a:rPr>
+              <a:t>•  srp — Envía/recibe en capa 2 (Ethernet), necesario para ARP</a:t>
             </a:r>
           </a:p>
         </p:txBody>
@@ -4524,7 +5066,7 @@
                   <a:srgbClr val="0B3D2E"/>
                 </a:solidFill>
               </a:rPr>
-              <a:t>✍️ Ejercicios</a:t>
+              <a:t>🧰 Herramientas y preparación</a:t>
             </a:r>
           </a:p>
         </p:txBody>
@@ -4562,82 +5104,22 @@
                   <a:srgbClr val="22282E"/>
                 </a:solidFill>
               </a:rPr>
-              <a:t>•  Modifica el ping para ajustar el TTL y observa el efecto con traceroute manual.</a:t>
-            </a:r>
-          </a:p>
-          <a:p>
-            <a:pPr>
-              <a:spcAft>
-                <a:spcPts val="600"/>
-              </a:spcAft>
-            </a:pPr>
-            <a:r>
-              <a:rPr sz="1500">
-                <a:solidFill>
-                  <a:srgbClr val="22282E"/>
-                </a:solidFill>
-              </a:rPr>
-              <a:t>•  Escribe un escáner que recorra una lista de puertos con SYN scan y clasifique cada uno.</a:t>
-            </a:r>
-          </a:p>
-          <a:p>
-            <a:pPr>
-              <a:spcAft>
-                <a:spcPts val="600"/>
-              </a:spcAft>
-            </a:pPr>
-            <a:r>
-              <a:rPr sz="1500">
-                <a:solidFill>
-                  <a:srgbClr val="22282E"/>
-                </a:solidFill>
-              </a:rPr>
-              <a:t>•  Implementa un descubrimiento de hosts combinando ICMP y ARP.</a:t>
-            </a:r>
-          </a:p>
-          <a:p>
-            <a:pPr>
-              <a:spcAft>
-                <a:spcPts val="600"/>
-              </a:spcAft>
-            </a:pPr>
-            <a:r>
-              <a:rPr sz="1500">
-                <a:solidFill>
-                  <a:srgbClr val="22282E"/>
-                </a:solidFill>
-              </a:rPr>
-              <a:t>•  Captura 20 paquetes y extrae con Scapy las IPs origen únicas.</a:t>
-            </a:r>
-          </a:p>
-          <a:p>
-            <a:pPr>
-              <a:spcAft>
-                <a:spcPts val="600"/>
-              </a:spcAft>
-            </a:pPr>
-            <a:r>
-              <a:rPr sz="1500">
-                <a:solidFill>
-                  <a:srgbClr val="22282E"/>
-                </a:solidFill>
-              </a:rPr>
-              <a:t>•  Forja un paquete UDP a un puerto DNS y analiza la respuesta ICMP si está cerrado.</a:t>
-            </a:r>
-          </a:p>
-          <a:p>
-            <a:pPr>
-              <a:spcAft>
-                <a:spcPts val="600"/>
-              </a:spcAft>
-            </a:pPr>
-            <a:r>
-              <a:rPr sz="1500">
-                <a:solidFill>
-                  <a:srgbClr val="22282E"/>
-                </a:solidFill>
-              </a:rPr>
-              <a:t>•  Añade el envío del RST tras un SYN-ACK para no dejar conexiones colgadas.</a:t>
+              <a:t>•  Instala Scapy en tu entorno virtual de Kali:</a:t>
+            </a:r>
+          </a:p>
+          <a:p>
+            <a:pPr>
+              <a:spcAft>
+                <a:spcPts val="600"/>
+              </a:spcAft>
+            </a:pPr>
+            <a:r>
+              <a:rPr sz="1500">
+                <a:solidFill>
+                  <a:srgbClr val="22282E"/>
+                </a:solidFill>
+              </a:rPr>
+              <a:t>•  Trabaja siempre en la red interna del laboratorio, con la NIC de la VM en modo host-only o red interna para no tocar redes reales. Ten Wireshark abierto en paralelo, filtrando por la interfaz…</a:t>
             </a:r>
           </a:p>
         </p:txBody>
@@ -4688,7 +5170,7 @@
                   <a:srgbClr val="0B3D2E"/>
                 </a:solidFill>
               </a:rPr>
-              <a:t>📝 Reto verificable</a:t>
+              <a:t>🧪 Laboratorio guiado</a:t>
             </a:r>
           </a:p>
         </p:txBody>
@@ -4726,22 +5208,82 @@
                   <a:srgbClr val="22282E"/>
                 </a:solidFill>
               </a:rPr>
-              <a:t>•  Implementa scapyscan.py, un escáner SYN con Scapy que reciba un objetivo y una lista de puertos, clasifique cada puerto como abierto/cerrado/filtrado según la respuesta, cierre con RST los que respondan SYN-ACK, y muestre un informe. Verifica con Wireshark que los paquetes salen correctos.</a:t>
-            </a:r>
-          </a:p>
-          <a:p>
-            <a:pPr>
-              <a:spcAft>
-                <a:spcPts val="600"/>
-              </a:spcAft>
-            </a:pPr>
-            <a:r>
-              <a:rPr sz="1500">
-                <a:solidFill>
-                  <a:srgbClr val="22282E"/>
-                </a:solidFill>
-              </a:rPr>
-              <a:t>•  Criterio de aceptación: el clasificador coincide con nmap -sS sobre los mismos puertos de tu VM víctima (abierto/cerrado/filtrado), y en Wireshark se observa el patrón SYN → SYN-ACK → RST para los puertos abiertos. Ejecuta con privilegios y sin dejar conexiones a medias.</a:t>
+              <a:t>•  Forjar y ver un paquete:</a:t>
+            </a:r>
+          </a:p>
+          <a:p>
+            <a:pPr>
+              <a:spcAft>
+                <a:spcPts val="600"/>
+              </a:spcAft>
+            </a:pPr>
+            <a:r>
+              <a:rPr sz="1500">
+                <a:solidFill>
+                  <a:srgbClr val="22282E"/>
+                </a:solidFill>
+              </a:rPr>
+              <a:t>•  Ping propio con sr1:</a:t>
+            </a:r>
+          </a:p>
+          <a:p>
+            <a:pPr>
+              <a:spcAft>
+                <a:spcPts val="600"/>
+              </a:spcAft>
+            </a:pPr>
+            <a:r>
+              <a:rPr sz="1500">
+                <a:solidFill>
+                  <a:srgbClr val="22282E"/>
+                </a:solidFill>
+              </a:rPr>
+              <a:t>•  Descubrimiento ARP en la subred (capa 2):</a:t>
+            </a:r>
+          </a:p>
+          <a:p>
+            <a:pPr>
+              <a:spcAft>
+                <a:spcPts val="600"/>
+              </a:spcAft>
+            </a:pPr>
+            <a:r>
+              <a:rPr sz="1500">
+                <a:solidFill>
+                  <a:srgbClr val="22282E"/>
+                </a:solidFill>
+              </a:rPr>
+              <a:t>•  SYN scan a mano de un puerto, cerrando limpiamente con RST:</a:t>
+            </a:r>
+          </a:p>
+          <a:p>
+            <a:pPr>
+              <a:spcAft>
+                <a:spcPts val="600"/>
+              </a:spcAft>
+            </a:pPr>
+            <a:r>
+              <a:rPr sz="1500">
+                <a:solidFill>
+                  <a:srgbClr val="22282E"/>
+                </a:solidFill>
+              </a:rPr>
+              <a:t>•  Sniffing con filtro BPF:</a:t>
+            </a:r>
+          </a:p>
+          <a:p>
+            <a:pPr>
+              <a:spcAft>
+                <a:spcPts val="600"/>
+              </a:spcAft>
+            </a:pPr>
+            <a:r>
+              <a:rPr sz="1500">
+                <a:solidFill>
+                  <a:srgbClr val="22282E"/>
+                </a:solidFill>
+              </a:rPr>
+              <a:t>•  Verifica en Wireshark que tus SYN forjados aparecen con los flags correctos y que ves el patrón SYN → SYN-ACK → RST en los puertos abiertos.</a:t>
             </a:r>
           </a:p>
         </p:txBody>
